--- a/src/test/fixtures/bs-template-min.pptx
+++ b/src/test/fixtures/bs-template-min.pptx
@@ -4605,8 +4605,633 @@
 </p:sldMaster>
 </file>
 
-<file path=ppt/slides/slide1.xml><?xml version='1.0' encoding='UTF-8' standalone='yes'?>
-<p:sld xmlns:a="http://schemas.openxmlformats.org/drawingml/2006/main" xmlns:r="http://schemas.openxmlformats.org/officeDocument/2006/relationships" xmlns:p="http://schemas.openxmlformats.org/presentationml/2006/main"><p:cSld><p:spTree><p:nvGrpSpPr><p:cNvPr id="1" name=""/><p:cNvGrpSpPr/><p:nvPr/></p:nvGrpSpPr><p:grpSpPr><a:xfrm><a:off x="0" y="0"/><a:ext cx="0" cy="0"/><a:chOff x="0" y="0"/><a:chExt cx="0" cy="0"/></a:xfrm></p:grpSpPr><p:pic><p:nvPicPr><p:cNvPr id="13" name="Imagem 12" descr="Por do sol no céu&#10;&#10;O conteúdo gerado por IA pode estar incorreto."><a:extLst><a:ext uri="{FF2B5EF4-FFF2-40B4-BE49-F238E27FC236}"><a16:creationId xmlns:a16="http://schemas.microsoft.com/office/drawing/2014/main" id="{7957CC44-8FCE-2D88-7E80-42C86E370962}"/></a:ext></a:extLst></p:cNvPr><p:cNvPicPr><a:picLocks noChangeAspect="1"/></p:cNvPicPr><p:nvPr/></p:nvPicPr><p:blipFill><a:blip r:embed="rId2" cstate="print"><a:alphaModFix amt="50000"/><a:duotone><a:prstClr val="black"/><a:schemeClr val="tx2"><a:tint val="45000"/><a:satMod val="400000"/></a:schemeClr></a:duotone><a:extLst><a:ext uri="{28A0092B-C50C-407E-A947-70E740481C1C}"><a14:useLocalDpi xmlns:a14="http://schemas.microsoft.com/office/drawing/2010/main"/></a:ext></a:extLst></a:blip><a:stretch><a:fillRect/></a:stretch></p:blipFill><p:spPr><a:xfrm><a:off x="0" y="9421"/><a:ext cx="9144000" cy="5124659"/></a:xfrm><a:prstGeom prst="rect"><a:avLst/></a:prstGeom></p:spPr></p:pic><p:grpSp><p:nvGrpSpPr><p:cNvPr id="3" name="Agrupar 2"><a:extLst><a:ext uri="{FF2B5EF4-FFF2-40B4-BE49-F238E27FC236}"><a16:creationId xmlns:a16="http://schemas.microsoft.com/office/drawing/2014/main" id="{594D9EA9-048A-94C7-25AD-3FAD2D8C0101}"/></a:ext></a:extLst></p:cNvPr><p:cNvGrpSpPr/><p:nvPr/></p:nvGrpSpPr><p:grpSpPr><a:xfrm><a:off x="-8018" y="-6850"/><a:ext cx="9160036" cy="5157199"/><a:chOff x="-8018" y="-6850"/><a:chExt cx="9160036" cy="5157199"/></a:xfrm></p:grpSpPr><p:pic><p:nvPicPr><p:cNvPr id="14" name="Imagem 13"><a:extLst><a:ext uri="{FF2B5EF4-FFF2-40B4-BE49-F238E27FC236}"><a16:creationId xmlns:a16="http://schemas.microsoft.com/office/drawing/2014/main" id="{F99C4937-4CA6-1681-AD12-714171C7B5CA}"/></a:ext></a:extLst></p:cNvPr><p:cNvPicPr><a:picLocks noChangeAspect="1"/></p:cNvPicPr><p:nvPr/></p:nvPicPr><p:blipFill><a:blip r:embed="rId3"><a:alphaModFix amt="80000"/><a:extLst><a:ext uri="{28A0092B-C50C-407E-A947-70E740481C1C}"><a14:useLocalDpi xmlns:a14="http://schemas.microsoft.com/office/drawing/2010/main"/></a:ext></a:extLst></a:blip><a:srcRect/><a:stretch/></p:blipFill><p:spPr><a:xfrm><a:off x="8018" y="9420"/><a:ext cx="9144000" cy="5140929"/></a:xfrm><a:prstGeom prst="rect"><a:avLst/></a:prstGeom></p:spPr></p:pic><p:sp><p:nvSpPr><p:cNvPr id="15" name="Retângulo 14"><a:extLst><a:ext uri="{FF2B5EF4-FFF2-40B4-BE49-F238E27FC236}"><a16:creationId xmlns:a16="http://schemas.microsoft.com/office/drawing/2014/main" id="{8FE16062-CD33-26EF-7852-EEB052C99ADF}"/></a:ext></a:extLst></p:cNvPr><p:cNvSpPr/><p:nvPr/></p:nvSpPr><p:spPr><a:xfrm><a:off x="-8018" y="-6850"/><a:ext cx="9144000" cy="2571750"/></a:xfrm><a:prstGeom prst="rect"><a:avLst/></a:prstGeom><a:gradFill><a:gsLst><a:gs pos="0"><a:schemeClr val="tx1"/></a:gs><a:gs pos="100000"><a:schemeClr val="tx1"><a:alpha val="0"/></a:schemeClr></a:gs></a:gsLst><a:lin ang="5400000" scaled="0"/></a:gradFill><a:ln><a:noFill/></a:ln></p:spPr><p:style><a:lnRef idx="2"><a:schemeClr val="accent1"><a:shade val="15000"/></a:schemeClr></a:lnRef><a:fillRef idx="1"><a:schemeClr val="accent1"/></a:fillRef><a:effectRef idx="0"><a:schemeClr val="accent1"/></a:effectRef><a:fontRef idx="minor"><a:schemeClr val="lt1"/></a:fontRef></p:style><p:txBody><a:bodyPr rtlCol="0" anchor="ctr"/><a:lstStyle/><a:p><a:pPr algn="r" defTabSz="685800"><a:defRPr/></a:pPr><a:endParaRPr lang="pt-BR" sz="1350" dirty="0"><a:solidFill><a:prstClr val="white"/></a:solidFill><a:latin typeface="Aptos" panose="02110004020202020204"/></a:endParaRPr></a:p></p:txBody></p:sp><p:pic><p:nvPicPr><p:cNvPr id="1026" name="Picture 2"><a:extLst><a:ext uri="{FF2B5EF4-FFF2-40B4-BE49-F238E27FC236}"><a16:creationId xmlns:a16="http://schemas.microsoft.com/office/drawing/2014/main" id="{8EC5D82E-1708-EF82-42BA-A36BC8676826}"/></a:ext></a:extLst></p:cNvPr><p:cNvPicPr><a:picLocks noChangeAspect="1" noChangeArrowheads="1"/></p:cNvPicPr><p:nvPr/></p:nvPicPr><p:blipFill rotWithShape="1"><a:blip r:embed="rId4"><a:lum bright="70000" contrast="-70000"/><a:extLst><a:ext uri="{28A0092B-C50C-407E-A947-70E740481C1C}"><a14:useLocalDpi xmlns:a14="http://schemas.microsoft.com/office/drawing/2010/main" val="0"/></a:ext></a:extLst></a:blip><a:srcRect t="12083" r="7926" b="18018"/><a:stretch><a:fillRect/></a:stretch></p:blipFill><p:spPr bwMode="auto"><a:xfrm><a:off x="3292307" y="9420"/><a:ext cx="5859711" cy="5124660"/></a:xfrm><a:prstGeom prst="rect"><a:avLst/></a:prstGeom><a:ln><a:noFill/></a:ln><a:effectLst><a:outerShdw blurRad="292100" dist="139700" dir="2700000" algn="tl" rotWithShape="0"><a:srgbClr val="333333"><a:alpha val="65000"/></a:srgbClr></a:outerShdw></a:effectLst><a:extLst><a:ext uri="{909E8E84-426E-40DD-AFC4-6F175D3DCCD1}"><a14:hiddenFill xmlns:a14="http://schemas.microsoft.com/office/drawing/2010/main"><a:solidFill><a:srgbClr val="FFFFFF"/></a:solidFill></a14:hiddenFill></a:ext></a:extLst></p:spPr></p:pic></p:grpSp><p:grpSp><p:nvGrpSpPr><p:cNvPr id="9" name="Agrupar 8"><a:extLst><a:ext uri="{FF2B5EF4-FFF2-40B4-BE49-F238E27FC236}"><a16:creationId xmlns:a16="http://schemas.microsoft.com/office/drawing/2014/main" id="{30CEFC08-205B-8686-D12E-6140C30AE475}"/></a:ext></a:extLst></p:cNvPr><p:cNvGrpSpPr/><p:nvPr/></p:nvGrpSpPr><p:grpSpPr><a:xfrm><a:off x="827709" y="561561"/><a:ext cx="4572000" cy="4029980"/><a:chOff x="1762125" y="1944643"/><a:chExt cx="6096000" cy="5373305"/></a:xfrm></p:grpSpPr><p:pic><p:nvPicPr><p:cNvPr id="4" name="Imagem 3" descr="Logotipo&#10;&#10;O conteúdo gerado por IA pode estar incorreto."><a:extLst><a:ext uri="{FF2B5EF4-FFF2-40B4-BE49-F238E27FC236}"><a16:creationId xmlns:a16="http://schemas.microsoft.com/office/drawing/2014/main" id="{73C2A960-B545-941C-B3A2-AF1C0BFA7973}"/></a:ext></a:extLst></p:cNvPr><p:cNvPicPr><a:picLocks noChangeAspect="1"/></p:cNvPicPr><p:nvPr/></p:nvPicPr><p:blipFill><a:blip r:embed="rId5"/><a:stretch><a:fillRect/></a:stretch></p:blipFill><p:spPr><a:xfrm><a:off x="1855203" y="1944643"/><a:ext cx="1831273" cy="503800"/></a:xfrm><a:prstGeom prst="rect"><a:avLst/></a:prstGeom></p:spPr></p:pic><p:sp><p:nvSpPr><p:cNvPr id="5" name="CaixaDeTexto 4"><a:extLst><a:ext uri="{FF2B5EF4-FFF2-40B4-BE49-F238E27FC236}"><a16:creationId xmlns:a16="http://schemas.microsoft.com/office/drawing/2014/main" id="{B841ECC1-4CCD-DADF-FC1F-E457228A3CB7}"/></a:ext></a:extLst></p:cNvPr><p:cNvSpPr txBox="1"/><p:nvPr/></p:nvSpPr><p:spPr><a:xfrm><a:off x="1762125" y="2561092"/><a:ext cx="6096000" cy="4756856"/></a:xfrm><a:prstGeom prst="rect"><a:avLst/></a:prstGeom><a:noFill/></p:spPr><p:txBody><a:bodyPr rot="0" spcFirstLastPara="0" vertOverflow="overflow" horzOverflow="overflow" vert="horz" wrap="square" lIns="68580" tIns="34290" rIns="68580" bIns="34290" numCol="1" spcCol="0" rtlCol="0" fromWordArt="0" anchor="t" anchorCtr="0" forceAA="0" compatLnSpc="1"><a:prstTxWarp prst="textNoShape"><a:avLst/></a:prstTxWarp><a:spAutoFit/></a:bodyPr><a:lstStyle/><a:p><a:pPr><a:lnSpc><a:spcPts val="4838"/></a:lnSpc></a:pPr><a:r><a:rPr lang="pt-BR" sz="4400" dirty="0"><a:solidFill><a:srgbClr val="E6F2ED"/></a:solidFill><a:latin typeface="Segoe UI Black"/><a:ea typeface="Segoe UI"/><a:cs typeface="Segoe UI"/></a:rPr><a:t>{{CAPA_TITULO}}</a:t></a:r></a:p><a:p><a:pPr><a:lnSpc><a:spcPts val="4838"/></a:lnSpc></a:pPr><a:r><a:rPr lang="pt-BR" sz="4400" dirty="0"><a:solidFill><a:srgbClr val="E6F2ED"/></a:solidFill><a:latin typeface="Segoe UI Black"/><a:cs typeface="Segoe UI"/></a:rPr><a:t>{{CAPA_SUBTITULO}}</a:t></a:r><a:endParaRPr lang="pt-BR" dirty="0"><a:solidFill><a:srgbClr val="E6F2ED"/></a:solidFill></a:endParaRPr></a:p><a:p><a:pPr><a:lnSpc><a:spcPts val="4838"/></a:lnSpc></a:pPr><a:r><a:rPr lang="pt-BR" sz="5400" dirty="0"><a:solidFill><a:srgbClr val="E6F2ED"/></a:solidFill><a:latin typeface="Segoe UI Black"/><a:ea typeface="Segoe UI"/><a:cs typeface="Segoe UI"/></a:rPr><a:t> </a:t></a:r><a:r><a:rPr sz="5400" dirty="0"><a:solidFill><a:srgbClr val="E6F2ED"/></a:solidFill><a:latin typeface="Segoe UI Black"/><a:ea typeface="Segoe UI Black"/><a:cs typeface="Segoe UI Black"/></a:rPr><a:t> </a:t></a:r></a:p><a:p><a:pPr><a:lnSpc><a:spcPts val="5221"/></a:lnSpc></a:pPr><a:endParaRPr sz="5400" dirty="0"><a:solidFill><a:srgbClr val="E6F2ED"/></a:solidFill><a:latin typeface="Segoe UI Black"/><a:ea typeface="Segoe UI Black"/><a:cs typeface="Segoe UI Black"/></a:endParaRPr></a:p><a:p><a:pPr algn="ctr"/><a:endParaRPr lang="pt-BR" sz="2400" dirty="0"><a:solidFill><a:srgbClr val="E6F2ED"/></a:solidFill></a:endParaRPr></a:p></p:txBody></p:sp></p:grpSp><p:sp><p:nvSpPr><p:cNvPr id="2" name="CaixaDeTexto 1"><a:extLst><a:ext uri="{FF2B5EF4-FFF2-40B4-BE49-F238E27FC236}"><a16:creationId xmlns:a16="http://schemas.microsoft.com/office/drawing/2014/main" id="{0200673C-D1A3-8A21-AFEF-503B564EC6E6}"/></a:ext></a:extLst></p:cNvPr><p:cNvSpPr txBox="1"/><p:nvPr/></p:nvSpPr><p:spPr><a:xfrm><a:off x="838199" y="3076161"/><a:ext cx="7026107" cy="1446550"/></a:xfrm><a:prstGeom prst="rect"><a:avLst/></a:prstGeom><a:noFill/></p:spPr><p:txBody><a:bodyPr wrap="square" lIns="91440" tIns="45720" rIns="91440" bIns="45720" rtlCol="0" anchor="t"><a:spAutoFit/></a:bodyPr><a:lstStyle/><a:p><a:r><a:rPr lang="pt-BR" sz="1400" dirty="0"><a:solidFill><a:schemeClr val="bg1"/></a:solidFill><a:latin typeface="Segoe UI"/><a:cs typeface="Segoe UI"/></a:rPr><a:t>{{DATA_EXTENSO}}</a:t></a:r><a:endParaRPr lang="pt-BR" sz="1200" dirty="0"><a:solidFill><a:srgbClr val="000000"/></a:solidFill><a:latin typeface="Segoe UI"/><a:cs typeface="Segoe UI"/></a:endParaRPr></a:p><a:p><a:r><a:rPr lang="pt-BR" sz="1200" b="1" dirty="0"><a:solidFill><a:schemeClr val="bg1"/></a:solidFill><a:latin typeface="Segoe UI"/><a:cs typeface="Segoe UI"/></a:rPr><a:t>{{CAPA_ROTULO_CLIENTE}} {{CLIENTE}}</a:t></a:r><a:endParaRPr lang="pt-BR" sz="1200" dirty="0"><a:solidFill><a:srgbClr val="000000"/></a:solidFill><a:latin typeface="Segoe UI"/><a:cs typeface="Segoe UI"/></a:endParaRPr></a:p><a:p><a:r><a:rPr lang="pt-BR" sz="1200" i="1" dirty="0"><a:solidFill><a:schemeClr val="bg1"><a:lumMod val="65000"/></a:schemeClr></a:solidFill><a:latin typeface="Segoe UI"/><a:cs typeface="Segoe UI"/></a:rPr><a:t>{{CAPA_ROTULO_POR}} {{ESPECIALISTA}}</a:t></a:r></a:p><a:p><a:pPr algn="r" defTabSz="685800"><a:defRPr/></a:pPr><a:endParaRPr lang="pt-BR" sz="1350" dirty="0"><a:solidFill><a:prstClr val="white"/></a:solidFill><a:latin typeface="Aptos" panose="02110004020202020204"/></a:endParaRPr></a:p></p:txBody></p:sp><p:pic><p:nvPicPr><p:cNvPr id="1026" name="Picture 2"><a:extLst><a:ext uri="{FF2B5EF4-FFF2-40B4-BE49-F238E27FC236}"><a16:creationId xmlns:a16="http://schemas.microsoft.com/office/drawing/2014/main" id="{8EC5D82E-1708-EF82-42BA-A36BC8676826}"/></a:ext></a:extLst></p:cNvPr><p:cNvPicPr><a:picLocks noChangeAspect="1" noChangeArrowheads="1"/></p:cNvPicPr><p:nvPr/></p:nvPicPr><p:blipFill rotWithShape="1"><a:blip r:embed="rId4"><a:lum bright="70000" contrast="-70000"/><a:extLst><a:ext uri="{28A0092B-C50C-407E-A947-70E740481C1C}"><a14:useLocalDpi xmlns:a14="http://schemas.microsoft.com/office/drawing/2010/main" val="0"/></a:ext></a:extLst></a:blip><a:srcRect t="12083" r="7926" b="18018"/><a:stretch><a:fillRect/></a:stretch></p:blipFill><p:spPr bwMode="auto"><a:xfrm><a:off x="3292307" y="9420"/><a:ext cx="5859711" cy="5124660"/></a:xfrm><a:prstGeom prst="rect"><a:avLst/></a:prstGeom><a:ln><a:noFill/></a:ln><a:effectLst><a:outerShdw blurRad="292100" dist="139700" dir="2700000" algn="tl" rotWithShape="0"><a:srgbClr val="333333"><a:alpha val="65000"/></a:srgbClr></a:outerShdw></a:effectLst><a:extLst><a:ext uri="{909E8E84-426E-40DD-AFC4-6F175D3DCCD1}"><a14:hiddenFill xmlns:a14="http://schemas.microsoft.com/office/drawing/2010/main"><a:solidFill><a:srgbClr val="FFFFFF"/></a:solidFill></a14:hiddenFill></a:ext></a:extLst></p:spPr></p:pic></p:grpSp><p:grpSp><p:nvGrpSpPr><p:cNvPr id="9" name="Agrupar 8"><a:extLst><a:ext uri="{FF2B5EF4-FFF2-40B4-BE49-F238E27FC236}"><a16:creationId xmlns:a16="http://schemas.microsoft.com/office/drawing/2014/main" id="{30CEFC08-205B-8686-D12E-6140C30AE475}"/></a:ext></a:extLst></p:cNvPr><p:cNvGrpSpPr/><p:nvPr/></p:nvGrpSpPr><p:grpSpPr><a:xfrm><a:off x="827709" y="561561"/><a:ext cx="4572000" cy="4029980"/><a:chOff x="1762125" y="1944643"/><a:chExt cx="6096000" cy="5373305"/></a:xfrm></p:grpSpPr><p:pic><p:nvPicPr><p:cNvPr id="4" name="Imagem 3" descr="Logotipo&#10;&#10;O conteúdo gerado por IA pode estar incorreto."><a:extLst><a:ext uri="{FF2B5EF4-FFF2-40B4-BE49-F238E27FC236}"><a16:creationId xmlns:a16="http://schemas.microsoft.com/office/drawing/2014/main" id="{73C2A960-B545-941C-B3A2-AF1C0BFA7973}"/></a:ext></a:extLst></p:cNvPr><p:cNvPicPr><a:picLocks noChangeAspect="1"/></p:cNvPicPr><p:nvPr/></p:nvPicPr><p:blipFill><a:blip r:embed="rId5"/><a:stretch><a:fillRect/></a:stretch></p:blipFill><p:spPr><a:xfrm><a:off x="1855203" y="1944643"/><a:ext cx="1831273" cy="503800"/></a:xfrm><a:prstGeom prst="rect"><a:avLst/></a:prstGeom></p:spPr></p:pic><p:sp><p:nvSpPr><p:cNvPr id="5" name="CaixaDeTexto 4"><a:extLst><a:ext uri="{FF2B5EF4-FFF2-40B4-BE49-F238E27FC236}"><a16:creationId xmlns:a16="http://schemas.microsoft.com/office/drawing/2014/main" id="{B841ECC1-4CCD-DADF-FC1F-E457228A3CB7}"/></a:ext></a:extLst></p:cNvPr><p:cNvSpPr txBox="1"/><p:nvPr/></p:nvSpPr><p:spPr><a:xfrm><a:off x="1762125" y="2561092"/><a:ext cx="6096000" cy="4756856"/></a:xfrm><a:prstGeom prst="rect"><a:avLst/></a:prstGeom><a:noFill/></p:spPr><p:txBody><a:bodyPr rot="0" spcFirstLastPara="0" vertOverflow="overflow" horzOverflow="overflow" vert="horz" wrap="square" lIns="68580" tIns="34290" rIns="68580" bIns="34290" numCol="1" spcCol="0" rtlCol="0" fromWordArt="0" anchor="t" anchorCtr="0" forceAA="0" compatLnSpc="1"><a:prstTxWarp prst="textNoShape"><a:avLst/></a:prstTxWarp><a:spAutoFit/></a:bodyPr><a:lstStyle/><a:p><a:pPr><a:lnSpc><a:spcPts val="4838"/></a:lnSpc></a:pPr><a:r><a:rPr lang="pt-BR" sz="4400" dirty="0"><a:solidFill><a:srgbClr val="E6F2ED"/></a:solidFill><a:latin typeface="Segoe UI Black"/><a:ea typeface="Segoe UI"/><a:cs typeface="Segoe UI"/></a:rPr><a:t>{{CAPA_TITULO}}</a:t></a:r></a:p><a:p><a:pPr><a:lnSpc><a:spcPts val="4838"/></a:lnSpc></a:pPr><a:r><a:rPr lang="pt-BR" sz="4400" dirty="0"><a:solidFill><a:srgbClr val="E6F2ED"/></a:solidFill><a:latin typeface="Segoe UI Black"/><a:cs typeface="Segoe UI"/></a:rPr><a:t>{{CAPA_SUBTITULO}}</a:t></a:r><a:endParaRPr lang="pt-BR" dirty="0"><a:solidFill><a:srgbClr val="E6F2ED"/></a:solidFill></a:endParaRPr></a:p><a:p><a:pPr><a:lnSpc><a:spcPts val="4838"/></a:lnSpc></a:pPr><a:r><a:rPr lang="pt-BR" sz="5400" dirty="0"><a:solidFill><a:srgbClr val="E6F2ED"/></a:solidFill><a:latin typeface="Segoe UI Black"/><a:ea typeface="Segoe UI"/><a:cs typeface="Segoe UI"/></a:rPr><a:t> </a:t></a:r><a:r><a:rPr sz="5400" dirty="0"><a:solidFill><a:srgbClr val="E6F2ED"/></a:solidFill><a:latin typeface="Segoe UI Black"/><a:ea typeface="Segoe UI Black"/><a:cs typeface="Segoe UI Black"/></a:rPr><a:t> </a:t></a:r></a:p><a:p><a:pPr><a:lnSpc><a:spcPts val="5221"/></a:lnSpc></a:pPr><a:endParaRPr sz="5400" dirty="0"><a:solidFill><a:srgbClr val="E6F2ED"/></a:solidFill><a:latin typeface="Segoe UI Black"/><a:ea typeface="Segoe UI Black"/><a:cs typeface="Segoe UI Black"/></a:endParaRPr></a:p><a:p><a:pPr algn="ctr"/><a:endParaRPr lang="pt-BR" sz="2400" dirty="0"><a:solidFill><a:srgbClr val="E6F2ED"/></a:solidFill></a:endParaRPr></a:p></p:txBody></p:sp></p:grpSp><p:sp><p:nvSpPr><p:cNvPr id="2" name="CaixaDeTexto 1"><a:extLst><a:ext uri="{FF2B5EF4-FFF2-40B4-BE49-F238E27FC236}"><a16:creationId xmlns:a16="http://schemas.microsoft.com/office/drawing/2014/main" id="{0200673C-D1A3-8A21-AFEF-503B564EC6E6}"/></a:ext></a:extLst></p:cNvPr><p:cNvSpPr txBox="1"/><p:nvPr/></p:nvSpPr><p:spPr><a:xfrm><a:off x="838199" y="3076161"/><a:ext cx="7026107" cy="1446550"/></a:xfrm><a:prstGeom prst="rect"><a:avLst/></a:prstGeom><a:noFill/></p:spPr><p:txBody><a:bodyPr wrap="square" lIns="91440" tIns="45720" rIns="91440" bIns="45720" rtlCol="0" anchor="t"><a:spAutoFit/></a:bodyPr><a:lstStyle/><a:p><a:r><a:rPr lang="pt-BR" sz="1400" dirty="0"><a:solidFill><a:schemeClr val="bg1"/></a:solidFill><a:latin typeface="Segoe UI"/><a:cs typeface="Segoe UI"/></a:rPr><a:t>{{DATA_EXTENSO}}</a:t></a:r><a:endParaRPr lang="pt-BR" sz="1200" dirty="0"><a:solidFill><a:srgbClr val="000000"/></a:solidFill><a:latin typeface="Segoe UI"/><a:cs typeface="Segoe UI"/></a:endParaRPr></a:p><a:p><a:r><a:rPr lang="pt-BR" sz="1200" b="1" dirty="0"><a:solidFill><a:schemeClr val="bg1"/></a:solidFill><a:latin typeface="Segoe UI"/><a:cs typeface="Segoe UI"/></a:rPr><a:t>{{CAPA_ROTULO_CLIENTE}} {{CLIENTE}}</a:t></a:r><a:endParaRPr lang="pt-BR" sz="1200" dirty="0"><a:solidFill><a:srgbClr val="000000"/></a:solidFill><a:latin typeface="Segoe UI"/><a:cs typeface="Segoe UI"/></a:endParaRPr></a:p><a:p><a:r><a:rPr lang="pt-BR" sz="1200" i="1" dirty="0"><a:solidFill><a:schemeClr val="bg1"><a:lumMod val="65000"/></a:schemeClr></a:solidFill><a:latin typeface="Segoe UI"/><a:cs typeface="Segoe UI"/></a:rPr><a:t>{{ESPECIALISTA_CARGO}}</a:t></a:r><a:endParaRPr lang="en-US" sz="1200" dirty="0"><a:solidFill><a:srgbClr val="000000"/></a:solidFill><a:latin typeface="Segoe UI"/><a:cs typeface="Segoe UI"/></a:endParaRPr></a:p><a:p><a:endParaRPr lang="pt-BR" sz="1400" dirty="0"><a:solidFill><a:schemeClr val="bg1"/></a:solidFill><a:latin typeface="Segoe UI" panose="020B0502040204020203" pitchFamily="34" charset="0"/><a:cs typeface="Segoe UI" panose="020B0502040204020203" pitchFamily="34" charset="0"/></a:endParaRPr></a:p></p:txBody></p:sp></p:spTree><p:extLst><p:ext uri="{BB962C8B-B14F-4D97-AF65-F5344CB8AC3E}"><p14:creationId xmlns:p14="http://schemas.microsoft.com/office/powerpoint/2010/main" val="2210866551"/></p:ext></p:extLst></p:cSld><p:clrMapOvr><a:masterClrMapping/></p:clrMapOvr><p:timing><p:tnLst><p:par><p:cTn id="1" dur="indefinite" restart="never" nodeType="tmRoot"><p:childTnLst><p:seq concurrent="1" nextAc="seek"><p:cTn id="2" dur="indefinite" nodeType="mainSeq"><p:childTnLst><p:par><p:cTn id="3" fill="hold"><p:stCondLst><p:cond delay="indefinite"/><p:cond evt="onBegin" delay="0"><p:tn val="2"/></p:cond></p:stCondLst><p:childTnLst><p:par><p:cTn id="4" fill="hold"><p:stCondLst><p:cond delay="0"/></p:stCondLst><p:childTnLst><p:par><p:cTn id="5" presetID="10" presetClass="entr" presetSubtype="0" fill="hold" nodeType="withEffect"><p:stCondLst><p:cond delay="0"/></p:stCondLst><p:childTnLst><p:set><p:cBhvr><p:cTn id="6" dur="1" fill="hold"><p:stCondLst><p:cond delay="0"/></p:stCondLst></p:cTn><p:tgtEl><p:spTgt spid="13"/></p:tgtEl><p:attrNameLst><p:attrName>style.visibility</p:attrName></p:attrNameLst></p:cBhvr><p:to><p:strVal val="visible"/></p:to></p:set><p:animEffect transition="in" filter="fade"><p:cBhvr><p:cTn id="7" dur="3000"/><p:tgtEl><p:spTgt spid="13"/></p:tgtEl></p:cBhvr></p:animEffect></p:childTnLst></p:cTn></p:par></p:childTnLst></p:cTn></p:par></p:childTnLst></p:cTn></p:par></p:childTnLst></p:cTn><p:prevCondLst><p:cond evt="onPrev" delay="0"><p:tgtEl><p:sldTgt/></p:tgtEl></p:cond></p:prevCondLst><p:nextCondLst><p:cond evt="onNext" delay="0"><p:tgtEl><p:sldTgt/></p:tgtEl></p:cond></p:nextCondLst></p:seq></p:childTnLst></p:cTn></p:par></p:tnLst></p:timing></p:sld>
+<file path=ppt/slides/slide1.xml><?xml version="1.0" encoding="utf-8"?>
+<p:sld xmlns:a="http://schemas.openxmlformats.org/drawingml/2006/main" xmlns:r="http://schemas.openxmlformats.org/officeDocument/2006/relationships" xmlns:p="http://schemas.openxmlformats.org/presentationml/2006/main">
+  <p:cSld>
+    <p:spTree>
+      <p:nvGrpSpPr>
+        <p:cNvPr id="1" name=""/>
+        <p:cNvGrpSpPr/>
+        <p:nvPr/>
+      </p:nvGrpSpPr>
+      <p:grpSpPr>
+        <a:xfrm>
+          <a:off x="0" y="0"/>
+          <a:ext cx="0" cy="0"/>
+          <a:chOff x="0" y="0"/>
+          <a:chExt cx="0" cy="0"/>
+        </a:xfrm>
+      </p:grpSpPr>
+      <p:pic>
+        <p:nvPicPr>
+          <p:cNvPr id="13" name="Imagem 12" descr="Por do sol no céu&#10;&#10;O conteúdo gerado por IA pode estar incorreto.">
+            <a:extLst>
+              <a:ext uri="{FF2B5EF4-FFF2-40B4-BE49-F238E27FC236}">
+                <a16:creationId xmlns:a16="http://schemas.microsoft.com/office/drawing/2014/main" id="{7957CC44-8FCE-2D88-7E80-42C86E370962}"/>
+              </a:ext>
+            </a:extLst>
+          </p:cNvPr>
+          <p:cNvPicPr>
+            <a:picLocks noChangeAspect="1"/>
+          </p:cNvPicPr>
+          <p:nvPr/>
+        </p:nvPicPr>
+        <p:blipFill>
+          <a:blip r:embed="rId2" cstate="print">
+            <a:alphaModFix amt="50000"/>
+            <a:duotone>
+              <a:prstClr val="black"/>
+              <a:schemeClr val="tx2">
+                <a:tint val="45000"/>
+                <a:satMod val="400000"/>
+              </a:schemeClr>
+            </a:duotone>
+            <a:extLst>
+              <a:ext uri="{28A0092B-C50C-407E-A947-70E740481C1C}">
+                <a14:useLocalDpi xmlns:a14="http://schemas.microsoft.com/office/drawing/2010/main"/>
+              </a:ext>
+            </a:extLst>
+          </a:blip>
+          <a:stretch>
+            <a:fillRect/>
+          </a:stretch>
+        </p:blipFill>
+        <p:spPr>
+          <a:xfrm>
+            <a:off x="0" y="9421"/>
+            <a:ext cx="9144000" cy="5124659"/>
+          </a:xfrm>
+          <a:prstGeom prst="rect">
+            <a:avLst/>
+          </a:prstGeom>
+        </p:spPr>
+      </p:pic>
+      <p:grpSp>
+        <p:nvGrpSpPr>
+          <p:cNvPr id="3" name="Agrupar 2">
+            <a:extLst>
+              <a:ext uri="{FF2B5EF4-FFF2-40B4-BE49-F238E27FC236}">
+                <a16:creationId xmlns:a16="http://schemas.microsoft.com/office/drawing/2014/main" id="{594D9EA9-048A-94C7-25AD-3FAD2D8C0101}"/>
+              </a:ext>
+            </a:extLst>
+          </p:cNvPr>
+          <p:cNvGrpSpPr/>
+          <p:nvPr/>
+        </p:nvGrpSpPr>
+        <p:grpSpPr>
+          <a:xfrm>
+            <a:off x="-8018" y="-6850"/>
+            <a:ext cx="9160036" cy="5157199"/>
+            <a:chOff x="-8018" y="-6850"/>
+            <a:chExt cx="9160036" cy="5157199"/>
+          </a:xfrm>
+        </p:grpSpPr>
+        <p:pic>
+          <p:nvPicPr>
+            <p:cNvPr id="14" name="Imagem 13">
+              <a:extLst>
+                <a:ext uri="{FF2B5EF4-FFF2-40B4-BE49-F238E27FC236}">
+                  <a16:creationId xmlns:a16="http://schemas.microsoft.com/office/drawing/2014/main" id="{F99C4937-4CA6-1681-AD12-714171C7B5CA}"/>
+                </a:ext>
+              </a:extLst>
+            </p:cNvPr>
+            <p:cNvPicPr>
+              <a:picLocks noChangeAspect="1"/>
+            </p:cNvPicPr>
+            <p:nvPr/>
+          </p:nvPicPr>
+          <p:blipFill>
+            <a:blip r:embed="rId3">
+              <a:alphaModFix amt="80000"/>
+              <a:extLst>
+                <a:ext uri="{28A0092B-C50C-407E-A947-70E740481C1C}">
+                  <a14:useLocalDpi xmlns:a14="http://schemas.microsoft.com/office/drawing/2010/main"/>
+                </a:ext>
+              </a:extLst>
+            </a:blip>
+            <a:srcRect/>
+            <a:stretch/>
+          </p:blipFill>
+          <p:spPr>
+            <a:xfrm>
+              <a:off x="8018" y="9420"/>
+              <a:ext cx="9144000" cy="5140929"/>
+            </a:xfrm>
+            <a:prstGeom prst="rect">
+              <a:avLst/>
+            </a:prstGeom>
+          </p:spPr>
+        </p:pic>
+        <p:sp>
+          <p:nvSpPr>
+            <p:cNvPr id="15" name="Retângulo 14">
+              <a:extLst>
+                <a:ext uri="{FF2B5EF4-FFF2-40B4-BE49-F238E27FC236}">
+                  <a16:creationId xmlns:a16="http://schemas.microsoft.com/office/drawing/2014/main" id="{8FE16062-CD33-26EF-7852-EEB052C99ADF}"/>
+                </a:ext>
+              </a:extLst>
+            </p:cNvPr>
+            <p:cNvSpPr/>
+            <p:nvPr/>
+          </p:nvSpPr>
+          <p:spPr>
+            <a:xfrm>
+              <a:off x="-8018" y="-6850"/>
+              <a:ext cx="9144000" cy="2571750"/>
+            </a:xfrm>
+            <a:prstGeom prst="rect">
+              <a:avLst/>
+            </a:prstGeom>
+            <a:gradFill>
+              <a:gsLst>
+                <a:gs pos="0">
+                  <a:schemeClr val="tx1"/>
+                </a:gs>
+                <a:gs pos="100000">
+                  <a:schemeClr val="tx1">
+                    <a:alpha val="0"/>
+                  </a:schemeClr>
+                </a:gs>
+              </a:gsLst>
+              <a:lin ang="5400000" scaled="0"/>
+            </a:gradFill>
+            <a:ln>
+              <a:noFill/>
+            </a:ln>
+          </p:spPr>
+          <p:style>
+            <a:lnRef idx="2">
+              <a:schemeClr val="accent1">
+                <a:shade val="15000"/>
+              </a:schemeClr>
+            </a:lnRef>
+            <a:fillRef idx="1">
+              <a:schemeClr val="accent1"/>
+            </a:fillRef>
+            <a:effectRef idx="0">
+              <a:schemeClr val="accent1"/>
+            </a:effectRef>
+            <a:fontRef idx="minor">
+              <a:schemeClr val="lt1"/>
+            </a:fontRef>
+          </p:style>
+          <p:txBody>
+            <a:bodyPr rtlCol="0" anchor="ctr"/>
+            <a:lstStyle/>
+            <a:p>
+              <a:pPr algn="r" defTabSz="685800">
+                <a:defRPr/>
+              </a:pPr>
+              <a:endParaRPr lang="pt-BR" sz="1350" dirty="0">
+                <a:solidFill>
+                  <a:prstClr val="white"/>
+                </a:solidFill>
+                <a:latin typeface="Aptos" panose="02110004020202020204"/>
+              </a:endParaRPr>
+            </a:p>
+          </p:txBody>
+        </p:sp>
+        <p:pic>
+          <p:nvPicPr>
+            <p:cNvPr id="1026" name="Picture 2">
+              <a:extLst>
+                <a:ext uri="{FF2B5EF4-FFF2-40B4-BE49-F238E27FC236}">
+                  <a16:creationId xmlns:a16="http://schemas.microsoft.com/office/drawing/2014/main" id="{8EC5D82E-1708-EF82-42BA-A36BC8676826}"/>
+                </a:ext>
+              </a:extLst>
+            </p:cNvPr>
+            <p:cNvPicPr>
+              <a:picLocks noChangeAspect="1" noChangeArrowheads="1"/>
+            </p:cNvPicPr>
+            <p:nvPr/>
+          </p:nvPicPr>
+          <p:blipFill rotWithShape="1">
+            <a:blip r:embed="rId4">
+              <a:lum bright="70000" contrast="-70000"/>
+              <a:extLst>
+                <a:ext uri="{28A0092B-C50C-407E-A947-70E740481C1C}">
+                  <a14:useLocalDpi xmlns:a14="http://schemas.microsoft.com/office/drawing/2010/main" val="0"/>
+                </a:ext>
+              </a:extLst>
+            </a:blip>
+            <a:srcRect t="12083" r="7926" b="18018"/>
+            <a:stretch>
+              <a:fillRect/>
+            </a:stretch>
+          </p:blipFill>
+          <p:spPr bwMode="auto">
+            <a:xfrm>
+              <a:off x="3292307" y="9420"/>
+              <a:ext cx="5859711" cy="5124660"/>
+            </a:xfrm>
+            <a:prstGeom prst="rect">
+              <a:avLst/>
+            </a:prstGeom>
+            <a:ln>
+              <a:noFill/>
+            </a:ln>
+            <a:effectLst>
+              <a:outerShdw blurRad="292100" dist="139700" dir="2700000" algn="tl" rotWithShape="0">
+                <a:srgbClr val="333333">
+                  <a:alpha val="65000"/>
+                </a:srgbClr>
+              </a:outerShdw>
+            </a:effectLst>
+            <a:extLst>
+              <a:ext uri="{909E8E84-426E-40DD-AFC4-6F175D3DCCD1}">
+                <a14:hiddenFill xmlns:a14="http://schemas.microsoft.com/office/drawing/2010/main">
+                  <a:solidFill>
+                    <a:srgbClr val="FFFFFF"/>
+                  </a:solidFill>
+                </a14:hiddenFill>
+              </a:ext>
+            </a:extLst>
+          </p:spPr>
+        </p:pic>
+      </p:grpSp>
+      <p:grpSp>
+        <p:nvGrpSpPr>
+          <p:cNvPr id="9" name="Agrupar 8">
+            <a:extLst>
+              <a:ext uri="{FF2B5EF4-FFF2-40B4-BE49-F238E27FC236}">
+                <a16:creationId xmlns:a16="http://schemas.microsoft.com/office/drawing/2014/main" id="{30CEFC08-205B-8686-D12E-6140C30AE475}"/>
+              </a:ext>
+            </a:extLst>
+          </p:cNvPr>
+          <p:cNvGrpSpPr/>
+          <p:nvPr/>
+        </p:nvGrpSpPr>
+        <p:grpSpPr>
+          <a:xfrm>
+            <a:off x="827709" y="561561"/>
+            <a:ext cx="4572000" cy="4029980"/>
+            <a:chOff x="1762125" y="1944643"/>
+            <a:chExt cx="6096000" cy="5373305"/>
+          </a:xfrm>
+        </p:grpSpPr>
+        <p:pic>
+          <p:nvPicPr>
+            <p:cNvPr id="4" name="Imagem 3" descr="Logotipo&#10;&#10;O conteúdo gerado por IA pode estar incorreto.">
+              <a:extLst>
+                <a:ext uri="{FF2B5EF4-FFF2-40B4-BE49-F238E27FC236}">
+                  <a16:creationId xmlns:a16="http://schemas.microsoft.com/office/drawing/2014/main" id="{73C2A960-B545-941C-B3A2-AF1C0BFA7973}"/>
+                </a:ext>
+              </a:extLst>
+            </p:cNvPr>
+            <p:cNvPicPr>
+              <a:picLocks noChangeAspect="1"/>
+            </p:cNvPicPr>
+            <p:nvPr/>
+          </p:nvPicPr>
+          <p:blipFill>
+            <a:blip r:embed="rId5"/>
+            <a:stretch>
+              <a:fillRect/>
+            </a:stretch>
+          </p:blipFill>
+          <p:spPr>
+            <a:xfrm>
+              <a:off x="1855203" y="1944643"/>
+              <a:ext cx="1831273" cy="503800"/>
+            </a:xfrm>
+            <a:prstGeom prst="rect">
+              <a:avLst/>
+            </a:prstGeom>
+          </p:spPr>
+        </p:pic>
+        <p:sp>
+          <p:nvSpPr>
+            <p:cNvPr id="5" name="CaixaDeTexto 4">
+              <a:extLst>
+                <a:ext uri="{FF2B5EF4-FFF2-40B4-BE49-F238E27FC236}">
+                  <a16:creationId xmlns:a16="http://schemas.microsoft.com/office/drawing/2014/main" id="{B841ECC1-4CCD-DADF-FC1F-E457228A3CB7}"/>
+                </a:ext>
+              </a:extLst>
+            </p:cNvPr>
+            <p:cNvSpPr txBox="1"/>
+            <p:nvPr/>
+          </p:nvSpPr>
+          <p:spPr>
+            <a:xfrm>
+              <a:off x="1762125" y="2561092"/>
+              <a:ext cx="6096000" cy="4756856"/>
+            </a:xfrm>
+            <a:prstGeom prst="rect">
+              <a:avLst/>
+            </a:prstGeom>
+            <a:noFill/>
+          </p:spPr>
+          <p:txBody>
+            <a:bodyPr rot="0" spcFirstLastPara="0" vertOverflow="overflow" horzOverflow="overflow" vert="horz" wrap="square" lIns="68580" tIns="34290" rIns="68580" bIns="34290" numCol="1" spcCol="0" rtlCol="0" fromWordArt="0" anchor="t" anchorCtr="0" forceAA="0" compatLnSpc="1">
+              <a:prstTxWarp prst="textNoShape">
+                <a:avLst/>
+              </a:prstTxWarp>
+              <a:spAutoFit/>
+            </a:bodyPr>
+            <a:lstStyle/>
+            <a:p>
+              <a:pPr>
+                <a:lnSpc>
+                  <a:spcPts val="4838"/>
+                </a:lnSpc>
+              </a:pPr>
+              <a:r>
+                <a:rPr lang="pt-BR" sz="4400" dirty="0">
+                  <a:solidFill>
+                    <a:srgbClr val="E6F2ED"/>
+                  </a:solidFill>
+                  <a:latin typeface="Segoe UI Black"/>
+                  <a:ea typeface="Segoe UI"/>
+                  <a:cs typeface="Segoe UI"/>
+                </a:rPr>
+                <a:t>{{CAPA_TITULO}}</a:t>
+              </a:r>
+            </a:p>
+            <a:p>
+              <a:pPr>
+                <a:lnSpc>
+                  <a:spcPts val="4838"/>
+                </a:lnSpc>
+              </a:pPr>
+              <a:r>
+                <a:rPr lang="pt-BR" sz="4400" dirty="0">
+                  <a:solidFill>
+                    <a:srgbClr val="E6F2ED"/>
+                  </a:solidFill>
+                  <a:latin typeface="Segoe UI Black"/>
+                  <a:cs typeface="Segoe UI"/>
+                </a:rPr>
+                <a:t>{{CAPA_SUBTITULO}}</a:t>
+              </a:r>
+              <a:endParaRPr lang="pt-BR" dirty="0">
+                <a:solidFill>
+                  <a:srgbClr val="E6F2ED"/>
+                </a:solidFill>
+              </a:endParaRPr>
+            </a:p>
+            <a:p>
+              <a:pPr>
+                <a:lnSpc>
+                  <a:spcPts val="4838"/>
+                </a:lnSpc>
+              </a:pPr>
+              <a:r>
+                <a:rPr lang="pt-BR" sz="5400" dirty="0">
+                  <a:solidFill>
+                    <a:srgbClr val="E6F2ED"/>
+                  </a:solidFill>
+                  <a:latin typeface="Segoe UI Black"/>
+                  <a:ea typeface="Segoe UI"/>
+                  <a:cs typeface="Segoe UI"/>
+                </a:rPr>
+                <a:t> </a:t>
+              </a:r>
+              <a:r>
+                <a:rPr sz="5400" dirty="0">
+                  <a:solidFill>
+                    <a:srgbClr val="E6F2ED"/>
+                  </a:solidFill>
+                  <a:latin typeface="Segoe UI Black"/>
+                  <a:ea typeface="Segoe UI Black"/>
+                  <a:cs typeface="Segoe UI Black"/>
+                </a:rPr>
+                <a:t> </a:t>
+              </a:r>
+            </a:p>
+            <a:p>
+              <a:pPr>
+                <a:lnSpc>
+                  <a:spcPts val="5221"/>
+                </a:lnSpc>
+              </a:pPr>
+              <a:endParaRPr sz="5400" dirty="0">
+                <a:solidFill>
+                  <a:srgbClr val="E6F2ED"/>
+                </a:solidFill>
+                <a:latin typeface="Segoe UI Black"/>
+                <a:ea typeface="Segoe UI Black"/>
+                <a:cs typeface="Segoe UI Black"/>
+              </a:endParaRPr>
+            </a:p>
+            <a:p>
+              <a:pPr algn="ctr"/>
+              <a:endParaRPr lang="pt-BR" sz="2400" dirty="0">
+                <a:solidFill>
+                  <a:srgbClr val="E6F2ED"/>
+                </a:solidFill>
+              </a:endParaRPr>
+            </a:p>
+          </p:txBody>
+        </p:sp>
+      </p:grpSp>
+      <p:sp>
+        <p:nvSpPr>
+          <p:cNvPr id="2" name="CaixaDeTexto 1">
+            <a:extLst>
+              <a:ext uri="{FF2B5EF4-FFF2-40B4-BE49-F238E27FC236}">
+                <a16:creationId xmlns:a16="http://schemas.microsoft.com/office/drawing/2014/main" id="{0200673C-D1A3-8A21-AFEF-503B564EC6E6}"/>
+              </a:ext>
+            </a:extLst>
+          </p:cNvPr>
+          <p:cNvSpPr txBox="1"/>
+          <p:nvPr/>
+        </p:nvSpPr>
+        <p:spPr>
+          <a:xfrm>
+            <a:off x="838199" y="3076161"/>
+            <a:ext cx="7026107" cy="1446550"/>
+          </a:xfrm>
+          <a:prstGeom prst="rect">
+            <a:avLst/>
+          </a:prstGeom>
+          <a:noFill/>
+        </p:spPr>
+        <p:txBody>
+          <a:bodyPr wrap="square" lIns="91440" tIns="45720" rIns="91440" bIns="45720" rtlCol="0" anchor="t">
+            <a:spAutoFit/>
+          </a:bodyPr>
+          <a:lstStyle/>
+          <a:p>
+            <a:r>
+              <a:rPr lang="pt-BR" sz="1400" dirty="0">
+                <a:solidFill>
+                  <a:schemeClr val="bg1"/>
+                </a:solidFill>
+                <a:latin typeface="Segoe UI"/>
+                <a:cs typeface="Segoe UI"/>
+              </a:rPr>
+              <a:t>{{DATA_EXTENSO}}</a:t>
+            </a:r>
+            <a:endParaRPr lang="pt-BR" sz="1200" dirty="0">
+              <a:solidFill>
+                <a:srgbClr val="000000"/>
+              </a:solidFill>
+              <a:latin typeface="Segoe UI"/>
+              <a:cs typeface="Segoe UI"/>
+            </a:endParaRPr>
+          </a:p>
+          <a:p>
+            <a:r>
+              <a:rPr lang="pt-BR" sz="1200" b="1" dirty="0">
+                <a:solidFill>
+                  <a:schemeClr val="bg1"/>
+                </a:solidFill>
+                <a:latin typeface="Segoe UI"/>
+                <a:cs typeface="Segoe UI"/>
+              </a:rPr>
+              <a:t>{{CAPA_ROTULO_CLIENTE}} {{CLIENTE}}</a:t>
+            </a:r>
+            <a:endParaRPr lang="pt-BR" sz="1200" dirty="0">
+              <a:solidFill>
+                <a:srgbClr val="000000"/>
+              </a:solidFill>
+              <a:latin typeface="Segoe UI"/>
+              <a:cs typeface="Segoe UI"/>
+            </a:endParaRPr>
+          </a:p>
+          <a:p>
+            <a:r>
+              <a:rPr lang="pt-BR" sz="1200" i="1" dirty="0">
+                <a:solidFill>
+                  <a:schemeClr val="bg1">
+                    <a:lumMod val="65000"/>
+                  </a:schemeClr>
+                </a:solidFill>
+                <a:latin typeface="Segoe UI"/>
+                <a:cs typeface="Segoe UI"/>
+              </a:rPr>
+              <a:t>{{CAPA_ROTULO_POR}} {{ESPECIALISTA}}</a:t>
+            </a:r>
+          </a:p>
+          <a:p>
+            <a:r>
+              <a:rPr lang="pt-BR" sz="1200" i="1" dirty="0">
+                <a:solidFill>
+                  <a:schemeClr val="bg1">
+                    <a:lumMod val="65000"/>
+                  </a:schemeClr>
+                </a:solidFill>
+                <a:latin typeface="Segoe UI"/>
+                <a:cs typeface="Segoe UI"/>
+              </a:rPr>
+              <a:t>{{ESPECIALISTA_CARGO}}</a:t>
+            </a:r>
+            <a:endParaRPr lang="en-US" sz="1200" dirty="0">
+              <a:solidFill>
+                <a:srgbClr val="000000"/>
+              </a:solidFill>
+              <a:latin typeface="Segoe UI"/>
+              <a:cs typeface="Segoe UI"/>
+            </a:endParaRPr>
+          </a:p>
+          <a:p>
+            <a:endParaRPr lang="pt-BR" sz="1400" dirty="0">
+              <a:solidFill>
+                <a:schemeClr val="bg1"/>
+              </a:solidFill>
+              <a:latin typeface="Segoe UI" panose="020B0502040204020203" pitchFamily="34" charset="0"/>
+              <a:cs typeface="Segoe UI" panose="020B0502040204020203" pitchFamily="34" charset="0"/>
+            </a:endParaRPr>
+          </a:p>
+        </p:txBody>
+      </p:sp>
+    </p:spTree>
+    <p:extLst>
+      <p:ext uri="{BB962C8B-B14F-4D97-AF65-F5344CB8AC3E}">
+        <p14:creationId xmlns:p14="http://schemas.microsoft.com/office/powerpoint/2010/main" val="2210866551"/>
+      </p:ext>
+    </p:extLst>
+  </p:cSld>
+  <p:clrMapOvr>
+    <a:masterClrMapping/>
+  </p:clrMapOvr>
+  <p:timing>
+    <p:tnLst>
+      <p:par>
+        <p:cTn id="1" dur="indefinite" restart="never" nodeType="tmRoot">
+          <p:childTnLst>
+            <p:seq concurrent="1" nextAc="seek">
+              <p:cTn id="2" dur="indefinite" nodeType="mainSeq">
+                <p:childTnLst>
+                  <p:par>
+                    <p:cTn id="3" fill="hold">
+                      <p:stCondLst>
+                        <p:cond delay="indefinite"/>
+                        <p:cond evt="onBegin" delay="0">
+                          <p:tn val="2"/>
+                        </p:cond>
+                      </p:stCondLst>
+                      <p:childTnLst>
+                        <p:par>
+                          <p:cTn id="4" fill="hold">
+                            <p:stCondLst>
+                              <p:cond delay="0"/>
+                            </p:stCondLst>
+                            <p:childTnLst>
+                              <p:par>
+                                <p:cTn id="5" presetID="10" presetClass="entr" presetSubtype="0" fill="hold" nodeType="withEffect">
+                                  <p:stCondLst>
+                                    <p:cond delay="0"/>
+                                  </p:stCondLst>
+                                  <p:childTnLst>
+                                    <p:set>
+                                      <p:cBhvr>
+                                        <p:cTn id="6" dur="1" fill="hold">
+                                          <p:stCondLst>
+                                            <p:cond delay="0"/>
+                                          </p:stCondLst>
+                                        </p:cTn>
+                                        <p:tgtEl>
+                                          <p:spTgt spid="13"/>
+                                        </p:tgtEl>
+                                        <p:attrNameLst>
+                                          <p:attrName>style.visibility</p:attrName>
+                                        </p:attrNameLst>
+                                      </p:cBhvr>
+                                      <p:to>
+                                        <p:strVal val="visible"/>
+                                      </p:to>
+                                    </p:set>
+                                    <p:animEffect transition="in" filter="fade">
+                                      <p:cBhvr>
+                                        <p:cTn id="7" dur="3000"/>
+                                        <p:tgtEl>
+                                          <p:spTgt spid="13"/>
+                                        </p:tgtEl>
+                                      </p:cBhvr>
+                                    </p:animEffect>
+                                  </p:childTnLst>
+                                </p:cTn>
+                              </p:par>
+                            </p:childTnLst>
+                          </p:cTn>
+                        </p:par>
+                      </p:childTnLst>
+                    </p:cTn>
+                  </p:par>
+                </p:childTnLst>
+              </p:cTn>
+              <p:prevCondLst>
+                <p:cond evt="onPrev" delay="0">
+                  <p:tgtEl>
+                    <p:sldTgt/>
+                  </p:tgtEl>
+                </p:cond>
+              </p:prevCondLst>
+              <p:nextCondLst>
+                <p:cond evt="onNext" delay="0">
+                  <p:tgtEl>
+                    <p:sldTgt/>
+                  </p:tgtEl>
+                </p:cond>
+              </p:nextCondLst>
+            </p:seq>
+          </p:childTnLst>
+        </p:cTn>
+      </p:par>
+    </p:tnLst>
+  </p:timing>
+</p:sld>
 </file>
 
 <file path=ppt/slides/slide10.xml><?xml version="1.0" encoding="utf-8"?>
